--- a/classes/parte-12-osint-e-ingenieria-social/253-geolocalizacion-y-analisis-de-imagenes/clase-253-presentacion.pptx
+++ b/classes/parte-12-osint-e-ingenieria-social/253-geolocalizacion-y-analisis-de-imagenes/clase-253-presentacion.pptx
@@ -18,6 +18,10 @@
     <p:sldId id="266" r:id="rId17"/>
     <p:sldId id="267" r:id="rId18"/>
     <p:sldId id="268" r:id="rId19"/>
+    <p:sldId id="269" r:id="rId20"/>
+    <p:sldId id="270" r:id="rId21"/>
+    <p:sldId id="271" r:id="rId22"/>
+    <p:sldId id="272" r:id="rId23"/>
   </p:sldIdLst>
   <p:sldSz cx="9144000" cy="6858000" type="screen4x3"/>
   <p:notesSz cx="6858000" cy="9144000"/>
@@ -3199,7 +3203,7 @@
                   <a:srgbClr val="0B3D2E"/>
                 </a:solidFill>
               </a:rPr>
-              <a:t>📝 Reto verificable</a:t>
+              <a:t>🧰 Herramientas y preparación</a:t>
             </a:r>
           </a:p>
         </p:txBody>
@@ -3237,52 +3241,82 @@
                   <a:srgbClr val="22282E"/>
                 </a:solidFill>
               </a:rPr>
-              <a:t>•  Geolocaliza y cronolocaliza una foto pública de práctica sin metadatos GPS, aportando: ubicación</a:t>
-            </a:r>
-          </a:p>
-          <a:p>
-            <a:pPr>
-              <a:spcAft>
-                <a:spcPts val="600"/>
-              </a:spcAft>
-            </a:pPr>
-            <a:r>
-              <a:rPr sz="1500">
-                <a:solidFill>
-                  <a:srgbClr val="22282E"/>
-                </a:solidFill>
-              </a:rPr>
-              <a:t>•  (con captura de Street View coincidente), fecha/hora estimada y análisis de autenticidad.</a:t>
-            </a:r>
-          </a:p>
-          <a:p>
-            <a:pPr>
-              <a:spcAft>
-                <a:spcPts val="600"/>
-              </a:spcAft>
-            </a:pPr>
-            <a:r>
-              <a:rPr sz="1500">
-                <a:solidFill>
-                  <a:srgbClr val="22282E"/>
-                </a:solidFill>
-              </a:rPr>
-              <a:t>•  Criterio de aceptación: la ubicación se corrobora con al menos dos pistas visuales</a:t>
-            </a:r>
-          </a:p>
-          <a:p>
-            <a:pPr>
-              <a:spcAft>
-                <a:spcPts val="600"/>
-              </a:spcAft>
-            </a:pPr>
-            <a:r>
-              <a:rPr sz="1500">
-                <a:solidFill>
-                  <a:srgbClr val="22282E"/>
-                </a:solidFill>
-              </a:rPr>
-              <a:t>•  independientes y una imagen de mapa/satélite que coincide con la escena.</a:t>
+              <a:t>•  Metadatos: exiftool foto.jpg; para lote, exiftool -csv .jpg &gt; meta.csv.</a:t>
+            </a:r>
+          </a:p>
+          <a:p>
+            <a:pPr>
+              <a:spcAft>
+                <a:spcPts val="600"/>
+              </a:spcAft>
+            </a:pPr>
+            <a:r>
+              <a:rPr sz="1500">
+                <a:solidFill>
+                  <a:srgbClr val="22282E"/>
+                </a:solidFill>
+              </a:rPr>
+              <a:t>•  Búsqueda inversa: Google Lens, Yandex Images (muy fuerte en geolocalización), TinEye, Bing Visual.</a:t>
+            </a:r>
+          </a:p>
+          <a:p>
+            <a:pPr>
+              <a:spcAft>
+                <a:spcPts val="600"/>
+              </a:spcAft>
+            </a:pPr>
+            <a:r>
+              <a:rPr sz="1500">
+                <a:solidFill>
+                  <a:srgbClr val="22282E"/>
+                </a:solidFill>
+              </a:rPr>
+              <a:t>•  Mapas y satélite: Google Earth, Google Street View, Mapillary, OpenStreetMap.</a:t>
+            </a:r>
+          </a:p>
+          <a:p>
+            <a:pPr>
+              <a:spcAft>
+                <a:spcPts val="600"/>
+              </a:spcAft>
+            </a:pPr>
+            <a:r>
+              <a:rPr sz="1500">
+                <a:solidFill>
+                  <a:srgbClr val="22282E"/>
+                </a:solidFill>
+              </a:rPr>
+              <a:t>•  Sombras/sol: SunCalc (https://www.suncalc.org) para chronolocation.</a:t>
+            </a:r>
+          </a:p>
+          <a:p>
+            <a:pPr>
+              <a:spcAft>
+                <a:spcPts val="600"/>
+              </a:spcAft>
+            </a:pPr>
+            <a:r>
+              <a:rPr sz="1500">
+                <a:solidFill>
+                  <a:srgbClr val="22282E"/>
+                </a:solidFill>
+              </a:rPr>
+              <a:t>•  Manipulación: FotoForensics (ELA), InVID/WeVerify para vídeo.</a:t>
+            </a:r>
+          </a:p>
+          <a:p>
+            <a:pPr>
+              <a:spcAft>
+                <a:spcPts val="600"/>
+              </a:spcAft>
+            </a:pPr>
+            <a:r>
+              <a:rPr sz="1500">
+                <a:solidFill>
+                  <a:srgbClr val="22282E"/>
+                </a:solidFill>
+              </a:rPr>
+              <a:t>•  Recordatorio: usa fotos propias o de bancos públicos; no persigas a personas reales.</a:t>
             </a:r>
           </a:p>
         </p:txBody>
@@ -3333,7 +3367,7 @@
                   <a:srgbClr val="0B3D2E"/>
                 </a:solidFill>
               </a:rPr>
-              <a:t>⚠️ Errores comunes</a:t>
+              <a:t>🧪 Laboratorio guiado</a:t>
             </a:r>
           </a:p>
         </p:txBody>
@@ -3371,67 +3405,97 @@
                   <a:srgbClr val="22282E"/>
                 </a:solidFill>
               </a:rPr>
-              <a:t>•  "No EXIF data found" — La plataforma lo eliminó. Pasa a geolocalización visual.</a:t>
-            </a:r>
-          </a:p>
-          <a:p>
-            <a:pPr>
-              <a:spcAft>
-                <a:spcPts val="600"/>
-              </a:spcAft>
-            </a:pPr>
-            <a:r>
-              <a:rPr sz="1500">
-                <a:solidFill>
-                  <a:srgbClr val="22282E"/>
-                </a:solidFill>
-              </a:rPr>
-              <a:t>•  Búsqueda inversa sin resultados — Google es débil en lugares. Prueba Yandex y Bing.</a:t>
-            </a:r>
-          </a:p>
-          <a:p>
-            <a:pPr>
-              <a:spcAft>
-                <a:spcPts val="600"/>
-              </a:spcAft>
-            </a:pPr>
-            <a:r>
-              <a:rPr sz="1500">
-                <a:solidFill>
-                  <a:srgbClr val="22282E"/>
-                </a:solidFill>
-              </a:rPr>
-              <a:t>•  Coordenadas apuntan al océano — Confusión lat/long o formato. Verifica orden y signo.</a:t>
-            </a:r>
-          </a:p>
-          <a:p>
-            <a:pPr>
-              <a:spcAft>
-                <a:spcPts val="600"/>
-              </a:spcAft>
-            </a:pPr>
-            <a:r>
-              <a:rPr sz="1500">
-                <a:solidFill>
-                  <a:srgbClr val="22282E"/>
-                </a:solidFill>
-              </a:rPr>
-              <a:t>•  Hora mal estimada — No se consideró zona horaria/DST. Ajusta con SunCalc y la ubicación.</a:t>
-            </a:r>
-          </a:p>
-          <a:p>
-            <a:pPr>
-              <a:spcAft>
-                <a:spcPts val="600"/>
-              </a:spcAft>
-            </a:pPr>
-            <a:r>
-              <a:rPr sz="1500">
-                <a:solidFill>
-                  <a:srgbClr val="22282E"/>
-                </a:solidFill>
-              </a:rPr>
-              <a:t>•  Falso positivo de manipulación — ELA malinterpretado por recompresión. Corrobora con más señales.</a:t>
+              <a:t>•  Objetivo: una foto tuya con GPS y una foto pública "misteriosa" de práctica.</a:t>
+            </a:r>
+          </a:p>
+          <a:p>
+            <a:pPr>
+              <a:spcAft>
+                <a:spcPts val="600"/>
+              </a:spcAft>
+            </a:pPr>
+            <a:r>
+              <a:rPr sz="1500">
+                <a:solidFill>
+                  <a:srgbClr val="22282E"/>
+                </a:solidFill>
+              </a:rPr>
+              <a:t>•  Extrae metadatos: exiftool foto.jpg — localiza GPS Position y Create Date.</a:t>
+            </a:r>
+          </a:p>
+          <a:p>
+            <a:pPr>
+              <a:spcAft>
+                <a:spcPts val="600"/>
+              </a:spcAft>
+            </a:pPr>
+            <a:r>
+              <a:rPr sz="1500">
+                <a:solidFill>
+                  <a:srgbClr val="22282E"/>
+                </a:solidFill>
+              </a:rPr>
+              <a:t>•  Convierte las coordenadas y ábrelas en Google Maps; confirma el lugar.</a:t>
+            </a:r>
+          </a:p>
+          <a:p>
+            <a:pPr>
+              <a:spcAft>
+                <a:spcPts val="600"/>
+              </a:spcAft>
+            </a:pPr>
+            <a:r>
+              <a:rPr sz="1500">
+                <a:solidFill>
+                  <a:srgbClr val="22282E"/>
+                </a:solidFill>
+              </a:rPr>
+              <a:t>•  Sube la foto a un servicio y descárgala: vuelve a correr exiftool y observa que el GPS desapareció.</a:t>
+            </a:r>
+          </a:p>
+          <a:p>
+            <a:pPr>
+              <a:spcAft>
+                <a:spcPts val="600"/>
+              </a:spcAft>
+            </a:pPr>
+            <a:r>
+              <a:rPr sz="1500">
+                <a:solidFill>
+                  <a:srgbClr val="22282E"/>
+                </a:solidFill>
+              </a:rPr>
+              <a:t>•  Con una foto sin EXIF, haz búsqueda inversa en Yandex y Google Lens; anota coincidencias.</a:t>
+            </a:r>
+          </a:p>
+          <a:p>
+            <a:pPr>
+              <a:spcAft>
+                <a:spcPts val="600"/>
+              </a:spcAft>
+            </a:pPr>
+            <a:r>
+              <a:rPr sz="1500">
+                <a:solidFill>
+                  <a:srgbClr val="22282E"/>
+                </a:solidFill>
+              </a:rPr>
+              <a:t>•  Geolocaliza por pistas: idioma de carteles, tipo de enchufes, señales de tráfico, vegetación.</a:t>
+            </a:r>
+          </a:p>
+          <a:p>
+            <a:pPr>
+              <a:spcAft>
+                <a:spcPts val="600"/>
+              </a:spcAft>
+            </a:pPr>
+            <a:r>
+              <a:rPr sz="1500">
+                <a:solidFill>
+                  <a:srgbClr val="22282E"/>
+                </a:solidFill>
+              </a:rPr>
+              <a:t>•  Verifica con Street View: encuadra el mismo edificio o esquina.</a:t>
             </a:r>
           </a:p>
         </p:txBody>
@@ -3482,7 +3546,7 @@
                   <a:srgbClr val="0B3D2E"/>
                 </a:solidFill>
               </a:rPr>
-              <a:t>❓ Preguntas frecuentes</a:t>
+              <a:t>✍️ Ejercicios</a:t>
             </a:r>
           </a:p>
         </p:txBody>
@@ -3520,97 +3584,82 @@
                   <a:srgbClr val="22282E"/>
                 </a:solidFill>
               </a:rPr>
-              <a:t>•  ❓ ¿Todas las fotos tienen GPS?</a:t>
-            </a:r>
-          </a:p>
-          <a:p>
-            <a:pPr>
-              <a:spcAft>
-                <a:spcPts val="600"/>
-              </a:spcAft>
-            </a:pPr>
-            <a:r>
-              <a:rPr sz="1500">
-                <a:solidFill>
-                  <a:srgbClr val="22282E"/>
-                </a:solidFill>
-              </a:rPr>
-              <a:t>•  No. Depende de la cámara/ajustes y casi todas las redes lo eliminan al subir. Por eso la</a:t>
-            </a:r>
-          </a:p>
-          <a:p>
-            <a:pPr>
-              <a:spcAft>
-                <a:spcPts val="600"/>
-              </a:spcAft>
-            </a:pPr>
-            <a:r>
-              <a:rPr sz="1500">
-                <a:solidFill>
-                  <a:srgbClr val="22282E"/>
-                </a:solidFill>
-              </a:rPr>
-              <a:t>•  geolocalización visual es imprescindible.</a:t>
-            </a:r>
-          </a:p>
-          <a:p>
-            <a:pPr>
-              <a:spcAft>
-                <a:spcPts val="600"/>
-              </a:spcAft>
-            </a:pPr>
-            <a:r>
-              <a:rPr sz="1500">
-                <a:solidFill>
-                  <a:srgbClr val="22282E"/>
-                </a:solidFill>
-              </a:rPr>
-              <a:t>•  ❓ ¿Yandex es mejor que Google para geolocalizar?</a:t>
-            </a:r>
-          </a:p>
-          <a:p>
-            <a:pPr>
-              <a:spcAft>
-                <a:spcPts val="600"/>
-              </a:spcAft>
-            </a:pPr>
-            <a:r>
-              <a:rPr sz="1500">
-                <a:solidFill>
-                  <a:srgbClr val="22282E"/>
-                </a:solidFill>
-              </a:rPr>
-              <a:t>•  A menudo sí para reconocimiento de lugares y rostros/escenas. Usa varios motores y combina resultados.</a:t>
-            </a:r>
-          </a:p>
-          <a:p>
-            <a:pPr>
-              <a:spcAft>
-                <a:spcPts val="600"/>
-              </a:spcAft>
-            </a:pPr>
-            <a:r>
-              <a:rPr sz="1500">
-                <a:solidFill>
-                  <a:srgbClr val="22282E"/>
-                </a:solidFill>
-              </a:rPr>
-              <a:t>•  ❓ ¿El ELA prueba que una imagen es falsa?</a:t>
-            </a:r>
-          </a:p>
-          <a:p>
-            <a:pPr>
-              <a:spcAft>
-                <a:spcPts val="600"/>
-              </a:spcAft>
-            </a:pPr>
-            <a:r>
-              <a:rPr sz="1500">
-                <a:solidFill>
-                  <a:srgbClr val="22282E"/>
-                </a:solidFill>
-              </a:rPr>
-              <a:t>•  No. Es un indicio. La verificación seria combina metadatos, búsqueda inversa, análisis visual y</a:t>
+              <a:t>•  Compara el EXIF de una foto antes y después de subirla a dos redes distintas.</a:t>
+            </a:r>
+          </a:p>
+          <a:p>
+            <a:pPr>
+              <a:spcAft>
+                <a:spcPts val="600"/>
+              </a:spcAft>
+            </a:pPr>
+            <a:r>
+              <a:rPr sz="1500">
+                <a:solidFill>
+                  <a:srgbClr val="22282E"/>
+                </a:solidFill>
+              </a:rPr>
+              <a:t>•  Geolocaliza una foto pública solo con pistas visuales y documenta el razonamiento.</a:t>
+            </a:r>
+          </a:p>
+          <a:p>
+            <a:pPr>
+              <a:spcAft>
+                <a:spcPts val="600"/>
+              </a:spcAft>
+            </a:pPr>
+            <a:r>
+              <a:rPr sz="1500">
+                <a:solidFill>
+                  <a:srgbClr val="22282E"/>
+                </a:solidFill>
+              </a:rPr>
+              <a:t>•  Usa SunCalc para estimar la hora de una foto con sombras claras.</a:t>
+            </a:r>
+          </a:p>
+          <a:p>
+            <a:pPr>
+              <a:spcAft>
+                <a:spcPts val="600"/>
+              </a:spcAft>
+            </a:pPr>
+            <a:r>
+              <a:rPr sz="1500">
+                <a:solidFill>
+                  <a:srgbClr val="22282E"/>
+                </a:solidFill>
+              </a:rPr>
+              <a:t>•  Detecta una imagen descontextualizada mediante búsqueda inversa.</a:t>
+            </a:r>
+          </a:p>
+          <a:p>
+            <a:pPr>
+              <a:spcAft>
+                <a:spcPts val="600"/>
+              </a:spcAft>
+            </a:pPr>
+            <a:r>
+              <a:rPr sz="1500">
+                <a:solidFill>
+                  <a:srgbClr val="22282E"/>
+                </a:solidFill>
+              </a:rPr>
+              <a:t>•  Explica por qué el ELA no es prueba concluyente de manipulación.</a:t>
+            </a:r>
+          </a:p>
+          <a:p>
+            <a:pPr>
+              <a:spcAft>
+                <a:spcPts val="600"/>
+              </a:spcAft>
+            </a:pPr>
+            <a:r>
+              <a:rPr sz="1500">
+                <a:solidFill>
+                  <a:srgbClr val="22282E"/>
+                </a:solidFill>
+              </a:rPr>
+              <a:t>•  Redacta una guía de 5 pasos para verificar una imagen viral antes de compartirla.</a:t>
             </a:r>
           </a:p>
         </p:txBody>
@@ -3661,7 +3710,7 @@
                   <a:srgbClr val="0B3D2E"/>
                 </a:solidFill>
               </a:rPr>
-              <a:t>🔗 Referencias</a:t>
+              <a:t>📝 Reto verificable</a:t>
             </a:r>
           </a:p>
         </p:txBody>
@@ -3699,6 +3748,468 @@
                   <a:srgbClr val="22282E"/>
                 </a:solidFill>
               </a:rPr>
+              <a:t>•  Geolocaliza y cronolocaliza una foto pública de práctica sin metadatos GPS, aportando: ubicación</a:t>
+            </a:r>
+          </a:p>
+          <a:p>
+            <a:pPr>
+              <a:spcAft>
+                <a:spcPts val="600"/>
+              </a:spcAft>
+            </a:pPr>
+            <a:r>
+              <a:rPr sz="1500">
+                <a:solidFill>
+                  <a:srgbClr val="22282E"/>
+                </a:solidFill>
+              </a:rPr>
+              <a:t>•  (con captura de Street View coincidente), fecha/hora estimada y análisis de autenticidad.</a:t>
+            </a:r>
+          </a:p>
+          <a:p>
+            <a:pPr>
+              <a:spcAft>
+                <a:spcPts val="600"/>
+              </a:spcAft>
+            </a:pPr>
+            <a:r>
+              <a:rPr sz="1500">
+                <a:solidFill>
+                  <a:srgbClr val="22282E"/>
+                </a:solidFill>
+              </a:rPr>
+              <a:t>•  Criterio de aceptación: la ubicación se corrobora con al menos dos pistas visuales</a:t>
+            </a:r>
+          </a:p>
+          <a:p>
+            <a:pPr>
+              <a:spcAft>
+                <a:spcPts val="600"/>
+              </a:spcAft>
+            </a:pPr>
+            <a:r>
+              <a:rPr sz="1500">
+                <a:solidFill>
+                  <a:srgbClr val="22282E"/>
+                </a:solidFill>
+              </a:rPr>
+              <a:t>•  independientes y una imagen de mapa/satélite que coincide con la escena.</a:t>
+            </a:r>
+          </a:p>
+        </p:txBody>
+      </p:sp>
+    </p:spTree>
+  </p:cSld>
+  <p:clrMapOvr>
+    <a:masterClrMapping/>
+  </p:clrMapOvr>
+</p:sld>
+</file>
+
+<file path=ppt/slides/slide14.xml><?xml version="1.0" encoding="utf-8"?>
+<p:sld xmlns:a="http://schemas.openxmlformats.org/drawingml/2006/main" xmlns:p="http://schemas.openxmlformats.org/presentationml/2006/main" xmlns:r="http://schemas.openxmlformats.org/officeDocument/2006/relationships">
+  <p:cSld>
+    <p:spTree>
+      <p:nvGrpSpPr>
+        <p:cNvPr id="1" name=""/>
+        <p:cNvGrpSpPr/>
+        <p:nvPr/>
+      </p:nvGrpSpPr>
+      <p:grpSpPr/>
+      <p:sp>
+        <p:nvSpPr>
+          <p:cNvPr id="2" name="TextBox 1"/>
+          <p:cNvSpPr txBox="1"/>
+          <p:nvPr/>
+        </p:nvSpPr>
+        <p:spPr>
+          <a:xfrm>
+            <a:off x="457200" y="320040"/>
+            <a:ext cx="8229600" cy="822960"/>
+          </a:xfrm>
+          <a:prstGeom prst="rect">
+            <a:avLst/>
+          </a:prstGeom>
+          <a:noFill/>
+        </p:spPr>
+        <p:txBody>
+          <a:bodyPr wrap="square">
+            <a:spAutoFit/>
+          </a:bodyPr>
+          <a:lstStyle/>
+          <a:p>
+            <a:r>
+              <a:rPr sz="2600" b="1">
+                <a:solidFill>
+                  <a:srgbClr val="0B3D2E"/>
+                </a:solidFill>
+              </a:rPr>
+              <a:t>⚠️ Errores comunes</a:t>
+            </a:r>
+          </a:p>
+        </p:txBody>
+      </p:sp>
+      <p:sp>
+        <p:nvSpPr>
+          <p:cNvPr id="3" name="TextBox 2"/>
+          <p:cNvSpPr txBox="1"/>
+          <p:nvPr/>
+        </p:nvSpPr>
+        <p:spPr>
+          <a:xfrm>
+            <a:off x="457200" y="1280160"/>
+            <a:ext cx="8229600" cy="4937760"/>
+          </a:xfrm>
+          <a:prstGeom prst="rect">
+            <a:avLst/>
+          </a:prstGeom>
+          <a:noFill/>
+        </p:spPr>
+        <p:txBody>
+          <a:bodyPr wrap="square">
+            <a:spAutoFit/>
+          </a:bodyPr>
+          <a:lstStyle/>
+          <a:p>
+            <a:pPr>
+              <a:spcAft>
+                <a:spcPts val="600"/>
+              </a:spcAft>
+            </a:pPr>
+            <a:r>
+              <a:rPr sz="1500">
+                <a:solidFill>
+                  <a:srgbClr val="22282E"/>
+                </a:solidFill>
+              </a:rPr>
+              <a:t>•  "No EXIF data found" — La plataforma lo eliminó. Pasa a geolocalización visual.</a:t>
+            </a:r>
+          </a:p>
+          <a:p>
+            <a:pPr>
+              <a:spcAft>
+                <a:spcPts val="600"/>
+              </a:spcAft>
+            </a:pPr>
+            <a:r>
+              <a:rPr sz="1500">
+                <a:solidFill>
+                  <a:srgbClr val="22282E"/>
+                </a:solidFill>
+              </a:rPr>
+              <a:t>•  Búsqueda inversa sin resultados — Google es débil en lugares. Prueba Yandex y Bing.</a:t>
+            </a:r>
+          </a:p>
+          <a:p>
+            <a:pPr>
+              <a:spcAft>
+                <a:spcPts val="600"/>
+              </a:spcAft>
+            </a:pPr>
+            <a:r>
+              <a:rPr sz="1500">
+                <a:solidFill>
+                  <a:srgbClr val="22282E"/>
+                </a:solidFill>
+              </a:rPr>
+              <a:t>•  Coordenadas apuntan al océano — Confusión lat/long o formato. Verifica orden y signo.</a:t>
+            </a:r>
+          </a:p>
+          <a:p>
+            <a:pPr>
+              <a:spcAft>
+                <a:spcPts val="600"/>
+              </a:spcAft>
+            </a:pPr>
+            <a:r>
+              <a:rPr sz="1500">
+                <a:solidFill>
+                  <a:srgbClr val="22282E"/>
+                </a:solidFill>
+              </a:rPr>
+              <a:t>•  Hora mal estimada — No se consideró zona horaria/DST. Ajusta con SunCalc y la ubicación.</a:t>
+            </a:r>
+          </a:p>
+          <a:p>
+            <a:pPr>
+              <a:spcAft>
+                <a:spcPts val="600"/>
+              </a:spcAft>
+            </a:pPr>
+            <a:r>
+              <a:rPr sz="1500">
+                <a:solidFill>
+                  <a:srgbClr val="22282E"/>
+                </a:solidFill>
+              </a:rPr>
+              <a:t>•  Falso positivo de manipulación — ELA malinterpretado por recompresión. Corrobora con más señales.</a:t>
+            </a:r>
+          </a:p>
+        </p:txBody>
+      </p:sp>
+    </p:spTree>
+  </p:cSld>
+  <p:clrMapOvr>
+    <a:masterClrMapping/>
+  </p:clrMapOvr>
+</p:sld>
+</file>
+
+<file path=ppt/slides/slide15.xml><?xml version="1.0" encoding="utf-8"?>
+<p:sld xmlns:a="http://schemas.openxmlformats.org/drawingml/2006/main" xmlns:p="http://schemas.openxmlformats.org/presentationml/2006/main" xmlns:r="http://schemas.openxmlformats.org/officeDocument/2006/relationships">
+  <p:cSld>
+    <p:spTree>
+      <p:nvGrpSpPr>
+        <p:cNvPr id="1" name=""/>
+        <p:cNvGrpSpPr/>
+        <p:nvPr/>
+      </p:nvGrpSpPr>
+      <p:grpSpPr/>
+      <p:sp>
+        <p:nvSpPr>
+          <p:cNvPr id="2" name="TextBox 1"/>
+          <p:cNvSpPr txBox="1"/>
+          <p:nvPr/>
+        </p:nvSpPr>
+        <p:spPr>
+          <a:xfrm>
+            <a:off x="457200" y="320040"/>
+            <a:ext cx="8229600" cy="822960"/>
+          </a:xfrm>
+          <a:prstGeom prst="rect">
+            <a:avLst/>
+          </a:prstGeom>
+          <a:noFill/>
+        </p:spPr>
+        <p:txBody>
+          <a:bodyPr wrap="square">
+            <a:spAutoFit/>
+          </a:bodyPr>
+          <a:lstStyle/>
+          <a:p>
+            <a:r>
+              <a:rPr sz="2600" b="1">
+                <a:solidFill>
+                  <a:srgbClr val="0B3D2E"/>
+                </a:solidFill>
+              </a:rPr>
+              <a:t>❓ Preguntas frecuentes</a:t>
+            </a:r>
+          </a:p>
+        </p:txBody>
+      </p:sp>
+      <p:sp>
+        <p:nvSpPr>
+          <p:cNvPr id="3" name="TextBox 2"/>
+          <p:cNvSpPr txBox="1"/>
+          <p:nvPr/>
+        </p:nvSpPr>
+        <p:spPr>
+          <a:xfrm>
+            <a:off x="457200" y="1280160"/>
+            <a:ext cx="8229600" cy="4937760"/>
+          </a:xfrm>
+          <a:prstGeom prst="rect">
+            <a:avLst/>
+          </a:prstGeom>
+          <a:noFill/>
+        </p:spPr>
+        <p:txBody>
+          <a:bodyPr wrap="square">
+            <a:spAutoFit/>
+          </a:bodyPr>
+          <a:lstStyle/>
+          <a:p>
+            <a:pPr>
+              <a:spcAft>
+                <a:spcPts val="600"/>
+              </a:spcAft>
+            </a:pPr>
+            <a:r>
+              <a:rPr sz="1500">
+                <a:solidFill>
+                  <a:srgbClr val="22282E"/>
+                </a:solidFill>
+              </a:rPr>
+              <a:t>•  ❓ ¿Todas las fotos tienen GPS?</a:t>
+            </a:r>
+          </a:p>
+          <a:p>
+            <a:pPr>
+              <a:spcAft>
+                <a:spcPts val="600"/>
+              </a:spcAft>
+            </a:pPr>
+            <a:r>
+              <a:rPr sz="1500">
+                <a:solidFill>
+                  <a:srgbClr val="22282E"/>
+                </a:solidFill>
+              </a:rPr>
+              <a:t>•  No. Depende de la cámara/ajustes y casi todas las redes lo eliminan al subir. Por eso la</a:t>
+            </a:r>
+          </a:p>
+          <a:p>
+            <a:pPr>
+              <a:spcAft>
+                <a:spcPts val="600"/>
+              </a:spcAft>
+            </a:pPr>
+            <a:r>
+              <a:rPr sz="1500">
+                <a:solidFill>
+                  <a:srgbClr val="22282E"/>
+                </a:solidFill>
+              </a:rPr>
+              <a:t>•  geolocalización visual es imprescindible.</a:t>
+            </a:r>
+          </a:p>
+          <a:p>
+            <a:pPr>
+              <a:spcAft>
+                <a:spcPts val="600"/>
+              </a:spcAft>
+            </a:pPr>
+            <a:r>
+              <a:rPr sz="1500">
+                <a:solidFill>
+                  <a:srgbClr val="22282E"/>
+                </a:solidFill>
+              </a:rPr>
+              <a:t>•  ❓ ¿Yandex es mejor que Google para geolocalizar?</a:t>
+            </a:r>
+          </a:p>
+          <a:p>
+            <a:pPr>
+              <a:spcAft>
+                <a:spcPts val="600"/>
+              </a:spcAft>
+            </a:pPr>
+            <a:r>
+              <a:rPr sz="1500">
+                <a:solidFill>
+                  <a:srgbClr val="22282E"/>
+                </a:solidFill>
+              </a:rPr>
+              <a:t>•  A menudo sí para reconocimiento de lugares y rostros/escenas. Usa varios motores y combina resultados.</a:t>
+            </a:r>
+          </a:p>
+          <a:p>
+            <a:pPr>
+              <a:spcAft>
+                <a:spcPts val="600"/>
+              </a:spcAft>
+            </a:pPr>
+            <a:r>
+              <a:rPr sz="1500">
+                <a:solidFill>
+                  <a:srgbClr val="22282E"/>
+                </a:solidFill>
+              </a:rPr>
+              <a:t>•  ❓ ¿El ELA prueba que una imagen es falsa?</a:t>
+            </a:r>
+          </a:p>
+          <a:p>
+            <a:pPr>
+              <a:spcAft>
+                <a:spcPts val="600"/>
+              </a:spcAft>
+            </a:pPr>
+            <a:r>
+              <a:rPr sz="1500">
+                <a:solidFill>
+                  <a:srgbClr val="22282E"/>
+                </a:solidFill>
+              </a:rPr>
+              <a:t>•  No. Es un indicio. La verificación seria combina metadatos, búsqueda inversa, análisis visual y</a:t>
+            </a:r>
+          </a:p>
+        </p:txBody>
+      </p:sp>
+    </p:spTree>
+  </p:cSld>
+  <p:clrMapOvr>
+    <a:masterClrMapping/>
+  </p:clrMapOvr>
+</p:sld>
+</file>
+
+<file path=ppt/slides/slide16.xml><?xml version="1.0" encoding="utf-8"?>
+<p:sld xmlns:a="http://schemas.openxmlformats.org/drawingml/2006/main" xmlns:p="http://schemas.openxmlformats.org/presentationml/2006/main" xmlns:r="http://schemas.openxmlformats.org/officeDocument/2006/relationships">
+  <p:cSld>
+    <p:spTree>
+      <p:nvGrpSpPr>
+        <p:cNvPr id="1" name=""/>
+        <p:cNvGrpSpPr/>
+        <p:nvPr/>
+      </p:nvGrpSpPr>
+      <p:grpSpPr/>
+      <p:sp>
+        <p:nvSpPr>
+          <p:cNvPr id="2" name="TextBox 1"/>
+          <p:cNvSpPr txBox="1"/>
+          <p:nvPr/>
+        </p:nvSpPr>
+        <p:spPr>
+          <a:xfrm>
+            <a:off x="457200" y="320040"/>
+            <a:ext cx="8229600" cy="822960"/>
+          </a:xfrm>
+          <a:prstGeom prst="rect">
+            <a:avLst/>
+          </a:prstGeom>
+          <a:noFill/>
+        </p:spPr>
+        <p:txBody>
+          <a:bodyPr wrap="square">
+            <a:spAutoFit/>
+          </a:bodyPr>
+          <a:lstStyle/>
+          <a:p>
+            <a:r>
+              <a:rPr sz="2600" b="1">
+                <a:solidFill>
+                  <a:srgbClr val="0B3D2E"/>
+                </a:solidFill>
+              </a:rPr>
+              <a:t>🔗 Referencias</a:t>
+            </a:r>
+          </a:p>
+        </p:txBody>
+      </p:sp>
+      <p:sp>
+        <p:nvSpPr>
+          <p:cNvPr id="3" name="TextBox 2"/>
+          <p:cNvSpPr txBox="1"/>
+          <p:nvPr/>
+        </p:nvSpPr>
+        <p:spPr>
+          <a:xfrm>
+            <a:off x="457200" y="1280160"/>
+            <a:ext cx="8229600" cy="4937760"/>
+          </a:xfrm>
+          <a:prstGeom prst="rect">
+            <a:avLst/>
+          </a:prstGeom>
+          <a:noFill/>
+        </p:spPr>
+        <p:txBody>
+          <a:bodyPr wrap="square">
+            <a:spAutoFit/>
+          </a:bodyPr>
+          <a:lstStyle/>
+          <a:p>
+            <a:pPr>
+              <a:spcAft>
+                <a:spcPts val="600"/>
+              </a:spcAft>
+            </a:pPr>
+            <a:r>
+              <a:rPr sz="1500">
+                <a:solidFill>
+                  <a:srgbClr val="22282E"/>
+                </a:solidFill>
+              </a:rPr>
               <a:t>•  Bellingcat — Online Investigation Toolkit. &lt;https://www.bellingcat.com/resources/&gt;</a:t>
             </a:r>
           </a:p>
@@ -3764,6 +4275,81 @@
           </a:p>
         </p:txBody>
       </p:sp>
+    </p:spTree>
+  </p:cSld>
+  <p:clrMapOvr>
+    <a:masterClrMapping/>
+  </p:clrMapOvr>
+</p:sld>
+</file>
+
+<file path=ppt/slides/slide17.xml><?xml version="1.0" encoding="utf-8"?>
+<p:sld xmlns:a="http://schemas.openxmlformats.org/drawingml/2006/main" xmlns:p="http://schemas.openxmlformats.org/presentationml/2006/main" xmlns:r="http://schemas.openxmlformats.org/officeDocument/2006/relationships">
+  <p:cSld>
+    <p:spTree>
+      <p:nvGrpSpPr>
+        <p:cNvPr id="1" name=""/>
+        <p:cNvGrpSpPr/>
+        <p:nvPr/>
+      </p:nvGrpSpPr>
+      <p:grpSpPr/>
+      <p:sp>
+        <p:nvSpPr>
+          <p:cNvPr id="2" name="TextBox 1"/>
+          <p:cNvSpPr txBox="1"/>
+          <p:nvPr/>
+        </p:nvSpPr>
+        <p:spPr>
+          <a:xfrm>
+            <a:off x="457200" y="274320"/>
+            <a:ext cx="8229600" cy="640080"/>
+          </a:xfrm>
+          <a:prstGeom prst="rect">
+            <a:avLst/>
+          </a:prstGeom>
+          <a:noFill/>
+        </p:spPr>
+        <p:txBody>
+          <a:bodyPr wrap="square">
+            <a:spAutoFit/>
+          </a:bodyPr>
+          <a:lstStyle/>
+          <a:p>
+            <a:r>
+              <a:rPr sz="2200" b="1">
+                <a:solidFill>
+                  <a:srgbClr val="0B3D2E"/>
+                </a:solidFill>
+              </a:rPr>
+              <a:t>Diagrama de la clase</a:t>
+            </a:r>
+          </a:p>
+        </p:txBody>
+      </p:sp>
+      <p:pic>
+        <p:nvPicPr>
+          <p:cNvPr id="3" name="Picture 2" descr="72aabaf8a9e8b1d7.png"/>
+          <p:cNvPicPr>
+            <a:picLocks noChangeAspect="1"/>
+          </p:cNvPicPr>
+          <p:nvPr/>
+        </p:nvPicPr>
+        <p:blipFill>
+          <a:blip r:embed="rId2"/>
+          <a:stretch>
+            <a:fillRect/>
+          </a:stretch>
+        </p:blipFill>
+        <p:spPr>
+          <a:xfrm>
+            <a:off x="1960297" y="1097280"/>
+            <a:ext cx="5223406" cy="5303520"/>
+          </a:xfrm>
+          <a:prstGeom prst="rect">
+            <a:avLst/>
+          </a:prstGeom>
+        </p:spPr>
+      </p:pic>
     </p:spTree>
   </p:cSld>
   <p:clrMapOvr>
@@ -4406,7 +4992,7 @@
                   <a:srgbClr val="0B3D2E"/>
                 </a:solidFill>
               </a:rPr>
-              <a:t>📖 Definiciones y características</a:t>
+              <a:t>🧠 Explicación en profundidad</a:t>
             </a:r>
           </a:p>
         </p:txBody>
@@ -4444,82 +5030,82 @@
                   <a:srgbClr val="22282E"/>
                 </a:solidFill>
               </a:rPr>
-              <a:t>•  EXIF: metadatos incrustados por la cámara (GPS, modelo, fecha). Característica: muy revelador, pero eliminado por muchas plataformas.</a:t>
-            </a:r>
-          </a:p>
-          <a:p>
-            <a:pPr>
-              <a:spcAft>
-                <a:spcPts val="600"/>
-              </a:spcAft>
-            </a:pPr>
-            <a:r>
-              <a:rPr sz="1500">
-                <a:solidFill>
-                  <a:srgbClr val="22282E"/>
-                </a:solidFill>
-              </a:rPr>
-              <a:t>•  Búsqueda inversa de imágenes: buscar dónde más aparece una foto. Característica: revela origen y descontextualización.</a:t>
-            </a:r>
-          </a:p>
-          <a:p>
-            <a:pPr>
-              <a:spcAft>
-                <a:spcPts val="600"/>
-              </a:spcAft>
-            </a:pPr>
-            <a:r>
-              <a:rPr sz="1500">
-                <a:solidFill>
-                  <a:srgbClr val="22282E"/>
-                </a:solidFill>
-              </a:rPr>
-              <a:t>•  Geolocation (visual): deducir ubicación por elementos de la escena. Característica: no necesita metadatos.</a:t>
-            </a:r>
-          </a:p>
-          <a:p>
-            <a:pPr>
-              <a:spcAft>
-                <a:spcPts val="600"/>
-              </a:spcAft>
-            </a:pPr>
-            <a:r>
-              <a:rPr sz="1500">
-                <a:solidFill>
-                  <a:srgbClr val="22282E"/>
-                </a:solidFill>
-              </a:rPr>
-              <a:t>•  Chronolocation: estimar fecha/hora por sombras y contexto. Característica: usa geometría solar.</a:t>
-            </a:r>
-          </a:p>
-          <a:p>
-            <a:pPr>
-              <a:spcAft>
-                <a:spcPts val="600"/>
-              </a:spcAft>
-            </a:pPr>
-            <a:r>
-              <a:rPr sz="1500">
-                <a:solidFill>
-                  <a:srgbClr val="22282E"/>
-                </a:solidFill>
-              </a:rPr>
-              <a:t>•  Descontextualización: imagen real usada fuera de su contexto original. Característica: desinformación frecuente.</a:t>
-            </a:r>
-          </a:p>
-          <a:p>
-            <a:pPr>
-              <a:spcAft>
-                <a:spcPts val="600"/>
-              </a:spcAft>
-            </a:pPr>
-            <a:r>
-              <a:rPr sz="1500">
-                <a:solidFill>
-                  <a:srgbClr val="22282E"/>
-                </a:solidFill>
-              </a:rPr>
-              <a:t>•  ELA (Error Level Analysis): técnica para detectar zonas editadas. Característica: indicio, no prueba concluyente.</a:t>
+              <a:t>•  Una imagen puede contener metadatos, texto, arquitectura, vegetación, relieve, clima, sombras, señales viales y patrones de transporte. Ninguna pista aislada suele bastar. La geolocalización…</a:t>
+            </a:r>
+          </a:p>
+          <a:p>
+            <a:pPr>
+              <a:spcAft>
+                <a:spcPts val="600"/>
+              </a:spcAft>
+            </a:pPr>
+            <a:r>
+              <a:rPr sz="1500">
+                <a:solidFill>
+                  <a:srgbClr val="22282E"/>
+                </a:solidFill>
+              </a:rPr>
+              <a:t>•  Los metadatos EXIF pueden incluir coordenadas y fecha, pero plataformas suelen eliminarlos y cualquier archivo puede ser editado. Se registran como pista, no como verdad. El texto se transcribe antes…</a:t>
+            </a:r>
+          </a:p>
+          <a:p>
+            <a:pPr>
+              <a:spcAft>
+                <a:spcPts val="600"/>
+              </a:spcAft>
+            </a:pPr>
+            <a:r>
+              <a:rPr sz="1500">
+                <a:solidFill>
+                  <a:srgbClr val="22282E"/>
+                </a:solidFill>
+              </a:rPr>
+              <a:t>•  La sombra depende de fecha, hora, orientación y geometría. Sin conocer la vertical del objeto, la cámara y el horizonte, calcular una hora exacta produce falsa precisión. Es más seguro usarla para…</a:t>
+            </a:r>
+          </a:p>
+          <a:p>
+            <a:pPr>
+              <a:spcAft>
+                <a:spcPts val="600"/>
+              </a:spcAft>
+            </a:pPr>
+            <a:r>
+              <a:rPr sz="1500">
+                <a:solidFill>
+                  <a:srgbClr val="22282E"/>
+                </a:solidFill>
+              </a:rPr>
+              <a:t>•  La conclusión puede tener granularidad de país, ciudad, tramo de calle o coordenada. Informar más precisión que la evidencia es un error. En contextos sensibles se generaliza la ubicación para no…</a:t>
+            </a:r>
+          </a:p>
+          <a:p>
+            <a:pPr>
+              <a:spcAft>
+                <a:spcPts val="600"/>
+              </a:spcAft>
+            </a:pPr>
+            <a:r>
+              <a:rPr sz="1500">
+                <a:solidFill>
+                  <a:srgbClr val="22282E"/>
+                </a:solidFill>
+              </a:rPr>
+              <a:t>•  Una búsqueda inversa puede encontrar copias anteriores, recortes o mayor resolución; no demuestra por sí sola que el primer resultado sea el original. El análisis de compresión y metadatos puede…</a:t>
+            </a:r>
+          </a:p>
+          <a:p>
+            <a:pPr>
+              <a:spcAft>
+                <a:spcPts val="600"/>
+              </a:spcAft>
+            </a:pPr>
+            <a:r>
+              <a:rPr sz="1500">
+                <a:solidFill>
+                  <a:srgbClr val="22282E"/>
+                </a:solidFill>
+              </a:rPr>
+              <a:t>•  Una fotografía conserva GPS de una plaza y se publica como actual. Las coordenadas coinciden, pero una búsqueda inversa encuentra la misma imagen años antes; además, una obra visible ya no existe. El…</a:t>
             </a:r>
           </a:p>
         </p:txBody>
@@ -4570,7 +5156,7 @@
                   <a:srgbClr val="0B3D2E"/>
                 </a:solidFill>
               </a:rPr>
-              <a:t>🧰 Herramientas y preparación</a:t>
+              <a:t>📔 Glosario operativo</a:t>
             </a:r>
           </a:p>
         </p:txBody>
@@ -4608,82 +5194,82 @@
                   <a:srgbClr val="22282E"/>
                 </a:solidFill>
               </a:rPr>
-              <a:t>•  Metadatos: exiftool foto.jpg; para lote, exiftool -csv .jpg &gt; meta.csv.</a:t>
-            </a:r>
-          </a:p>
-          <a:p>
-            <a:pPr>
-              <a:spcAft>
-                <a:spcPts val="600"/>
-              </a:spcAft>
-            </a:pPr>
-            <a:r>
-              <a:rPr sz="1500">
-                <a:solidFill>
-                  <a:srgbClr val="22282E"/>
-                </a:solidFill>
-              </a:rPr>
-              <a:t>•  Búsqueda inversa: Google Lens, Yandex Images (muy fuerte en geolocalización), TinEye, Bing Visual.</a:t>
-            </a:r>
-          </a:p>
-          <a:p>
-            <a:pPr>
-              <a:spcAft>
-                <a:spcPts val="600"/>
-              </a:spcAft>
-            </a:pPr>
-            <a:r>
-              <a:rPr sz="1500">
-                <a:solidFill>
-                  <a:srgbClr val="22282E"/>
-                </a:solidFill>
-              </a:rPr>
-              <a:t>•  Mapas y satélite: Google Earth, Google Street View, Mapillary, OpenStreetMap.</a:t>
-            </a:r>
-          </a:p>
-          <a:p>
-            <a:pPr>
-              <a:spcAft>
-                <a:spcPts val="600"/>
-              </a:spcAft>
-            </a:pPr>
-            <a:r>
-              <a:rPr sz="1500">
-                <a:solidFill>
-                  <a:srgbClr val="22282E"/>
-                </a:solidFill>
-              </a:rPr>
-              <a:t>•  Sombras/sol: SunCalc (https://www.suncalc.org) para chronolocation.</a:t>
-            </a:r>
-          </a:p>
-          <a:p>
-            <a:pPr>
-              <a:spcAft>
-                <a:spcPts val="600"/>
-              </a:spcAft>
-            </a:pPr>
-            <a:r>
-              <a:rPr sz="1500">
-                <a:solidFill>
-                  <a:srgbClr val="22282E"/>
-                </a:solidFill>
-              </a:rPr>
-              <a:t>•  Manipulación: FotoForensics (ELA), InVID/WeVerify para vídeo.</a:t>
-            </a:r>
-          </a:p>
-          <a:p>
-            <a:pPr>
-              <a:spcAft>
-                <a:spcPts val="600"/>
-              </a:spcAft>
-            </a:pPr>
-            <a:r>
-              <a:rPr sz="1500">
-                <a:solidFill>
-                  <a:srgbClr val="22282E"/>
-                </a:solidFill>
-              </a:rPr>
-              <a:t>•  Recordatorio: usa fotos propias o de bancos públicos; no persigas a personas reales.</a:t>
+              <a:t>•  Término — Definición útil</a:t>
+            </a:r>
+          </a:p>
+          <a:p>
+            <a:pPr>
+              <a:spcAft>
+                <a:spcPts val="600"/>
+              </a:spcAft>
+            </a:pPr>
+            <a:r>
+              <a:rPr sz="1500">
+                <a:solidFill>
+                  <a:srgbClr val="22282E"/>
+                </a:solidFill>
+              </a:rPr>
+              <a:t>•  EXIF — Metadatos de captura que pueden faltar o modificarse.</a:t>
+            </a:r>
+          </a:p>
+          <a:p>
+            <a:pPr>
+              <a:spcAft>
+                <a:spcPts val="600"/>
+              </a:spcAft>
+            </a:pPr>
+            <a:r>
+              <a:rPr sz="1500">
+                <a:solidFill>
+                  <a:srgbClr val="22282E"/>
+                </a:solidFill>
+              </a:rPr>
+              <a:t>•  Geolocalización — Inferencia del lugar representado.</a:t>
+            </a:r>
+          </a:p>
+          <a:p>
+            <a:pPr>
+              <a:spcAft>
+                <a:spcPts val="600"/>
+              </a:spcAft>
+            </a:pPr>
+            <a:r>
+              <a:rPr sz="1500">
+                <a:solidFill>
+                  <a:srgbClr val="22282E"/>
+                </a:solidFill>
+              </a:rPr>
+              <a:t>•  Cronolocalización — Inferencia de fecha o periodo de captura.</a:t>
+            </a:r>
+          </a:p>
+          <a:p>
+            <a:pPr>
+              <a:spcAft>
+                <a:spcPts val="600"/>
+              </a:spcAft>
+            </a:pPr>
+            <a:r>
+              <a:rPr sz="1500">
+                <a:solidFill>
+                  <a:srgbClr val="22282E"/>
+                </a:solidFill>
+              </a:rPr>
+              <a:t>•  Pista discriminante — Rasgo que diferencia candidatos de manera comprobable.</a:t>
+            </a:r>
+          </a:p>
+          <a:p>
+            <a:pPr>
+              <a:spcAft>
+                <a:spcPts val="600"/>
+              </a:spcAft>
+            </a:pPr>
+            <a:r>
+              <a:rPr sz="1500">
+                <a:solidFill>
+                  <a:srgbClr val="22282E"/>
+                </a:solidFill>
+              </a:rPr>
+              <a:t>•  Refutación — Búsqueda deliberada de incompatibilidades con una hipótesis.</a:t>
             </a:r>
           </a:p>
         </p:txBody>
@@ -4734,7 +5320,7 @@
                   <a:srgbClr val="0B3D2E"/>
                 </a:solidFill>
               </a:rPr>
-              <a:t>🧪 Laboratorio guiado</a:t>
+              <a:t>✅ Criterio de dominio</a:t>
             </a:r>
           </a:p>
         </p:txBody>
@@ -4772,97 +5358,7 @@
                   <a:srgbClr val="22282E"/>
                 </a:solidFill>
               </a:rPr>
-              <a:t>•  Objetivo: una foto tuya con GPS y una foto pública "misteriosa" de práctica.</a:t>
-            </a:r>
-          </a:p>
-          <a:p>
-            <a:pPr>
-              <a:spcAft>
-                <a:spcPts val="600"/>
-              </a:spcAft>
-            </a:pPr>
-            <a:r>
-              <a:rPr sz="1500">
-                <a:solidFill>
-                  <a:srgbClr val="22282E"/>
-                </a:solidFill>
-              </a:rPr>
-              <a:t>•  Extrae metadatos: exiftool foto.jpg — localiza GPS Position y Create Date.</a:t>
-            </a:r>
-          </a:p>
-          <a:p>
-            <a:pPr>
-              <a:spcAft>
-                <a:spcPts val="600"/>
-              </a:spcAft>
-            </a:pPr>
-            <a:r>
-              <a:rPr sz="1500">
-                <a:solidFill>
-                  <a:srgbClr val="22282E"/>
-                </a:solidFill>
-              </a:rPr>
-              <a:t>•  Convierte las coordenadas y ábrelas en Google Maps; confirma el lugar.</a:t>
-            </a:r>
-          </a:p>
-          <a:p>
-            <a:pPr>
-              <a:spcAft>
-                <a:spcPts val="600"/>
-              </a:spcAft>
-            </a:pPr>
-            <a:r>
-              <a:rPr sz="1500">
-                <a:solidFill>
-                  <a:srgbClr val="22282E"/>
-                </a:solidFill>
-              </a:rPr>
-              <a:t>•  Sube la foto a un servicio y descárgala: vuelve a correr exiftool y observa que el GPS desapareció.</a:t>
-            </a:r>
-          </a:p>
-          <a:p>
-            <a:pPr>
-              <a:spcAft>
-                <a:spcPts val="600"/>
-              </a:spcAft>
-            </a:pPr>
-            <a:r>
-              <a:rPr sz="1500">
-                <a:solidFill>
-                  <a:srgbClr val="22282E"/>
-                </a:solidFill>
-              </a:rPr>
-              <a:t>•  Con una foto sin EXIF, haz búsqueda inversa en Yandex y Google Lens; anota coincidencias.</a:t>
-            </a:r>
-          </a:p>
-          <a:p>
-            <a:pPr>
-              <a:spcAft>
-                <a:spcPts val="600"/>
-              </a:spcAft>
-            </a:pPr>
-            <a:r>
-              <a:rPr sz="1500">
-                <a:solidFill>
-                  <a:srgbClr val="22282E"/>
-                </a:solidFill>
-              </a:rPr>
-              <a:t>•  Geolocaliza por pistas: idioma de carteles, tipo de enchufes, señales de tráfico, vegetación.</a:t>
-            </a:r>
-          </a:p>
-          <a:p>
-            <a:pPr>
-              <a:spcAft>
-                <a:spcPts val="600"/>
-              </a:spcAft>
-            </a:pPr>
-            <a:r>
-              <a:rPr sz="1500">
-                <a:solidFill>
-                  <a:srgbClr val="22282E"/>
-                </a:solidFill>
-              </a:rPr>
-              <a:t>•  Verifica con Street View: encuadra el mismo edificio o esquina.</a:t>
+              <a:t>•  El alumno domina la clase cuando preserva el original, construye y descarta candidatos con al menos dos familias de evidencia, informa precisión y confianza acordes y protege ubicaciones sensibles.</a:t>
             </a:r>
           </a:p>
         </p:txBody>
@@ -4913,7 +5409,7 @@
                   <a:srgbClr val="0B3D2E"/>
                 </a:solidFill>
               </a:rPr>
-              <a:t>✍️ Ejercicios</a:t>
+              <a:t>📖 Definiciones y características</a:t>
             </a:r>
           </a:p>
         </p:txBody>
@@ -4951,82 +5447,82 @@
                   <a:srgbClr val="22282E"/>
                 </a:solidFill>
               </a:rPr>
-              <a:t>•  Compara el EXIF de una foto antes y después de subirla a dos redes distintas.</a:t>
-            </a:r>
-          </a:p>
-          <a:p>
-            <a:pPr>
-              <a:spcAft>
-                <a:spcPts val="600"/>
-              </a:spcAft>
-            </a:pPr>
-            <a:r>
-              <a:rPr sz="1500">
-                <a:solidFill>
-                  <a:srgbClr val="22282E"/>
-                </a:solidFill>
-              </a:rPr>
-              <a:t>•  Geolocaliza una foto pública solo con pistas visuales y documenta el razonamiento.</a:t>
-            </a:r>
-          </a:p>
-          <a:p>
-            <a:pPr>
-              <a:spcAft>
-                <a:spcPts val="600"/>
-              </a:spcAft>
-            </a:pPr>
-            <a:r>
-              <a:rPr sz="1500">
-                <a:solidFill>
-                  <a:srgbClr val="22282E"/>
-                </a:solidFill>
-              </a:rPr>
-              <a:t>•  Usa SunCalc para estimar la hora de una foto con sombras claras.</a:t>
-            </a:r>
-          </a:p>
-          <a:p>
-            <a:pPr>
-              <a:spcAft>
-                <a:spcPts val="600"/>
-              </a:spcAft>
-            </a:pPr>
-            <a:r>
-              <a:rPr sz="1500">
-                <a:solidFill>
-                  <a:srgbClr val="22282E"/>
-                </a:solidFill>
-              </a:rPr>
-              <a:t>•  Detecta una imagen descontextualizada mediante búsqueda inversa.</a:t>
-            </a:r>
-          </a:p>
-          <a:p>
-            <a:pPr>
-              <a:spcAft>
-                <a:spcPts val="600"/>
-              </a:spcAft>
-            </a:pPr>
-            <a:r>
-              <a:rPr sz="1500">
-                <a:solidFill>
-                  <a:srgbClr val="22282E"/>
-                </a:solidFill>
-              </a:rPr>
-              <a:t>•  Explica por qué el ELA no es prueba concluyente de manipulación.</a:t>
-            </a:r>
-          </a:p>
-          <a:p>
-            <a:pPr>
-              <a:spcAft>
-                <a:spcPts val="600"/>
-              </a:spcAft>
-            </a:pPr>
-            <a:r>
-              <a:rPr sz="1500">
-                <a:solidFill>
-                  <a:srgbClr val="22282E"/>
-                </a:solidFill>
-              </a:rPr>
-              <a:t>•  Redacta una guía de 5 pasos para verificar una imagen viral antes de compartirla.</a:t>
+              <a:t>•  EXIF: metadatos incrustados por la cámara (GPS, modelo, fecha). Característica: muy revelador, pero eliminado por muchas plataformas.</a:t>
+            </a:r>
+          </a:p>
+          <a:p>
+            <a:pPr>
+              <a:spcAft>
+                <a:spcPts val="600"/>
+              </a:spcAft>
+            </a:pPr>
+            <a:r>
+              <a:rPr sz="1500">
+                <a:solidFill>
+                  <a:srgbClr val="22282E"/>
+                </a:solidFill>
+              </a:rPr>
+              <a:t>•  Búsqueda inversa de imágenes: buscar dónde más aparece una foto. Característica: revela origen y descontextualización.</a:t>
+            </a:r>
+          </a:p>
+          <a:p>
+            <a:pPr>
+              <a:spcAft>
+                <a:spcPts val="600"/>
+              </a:spcAft>
+            </a:pPr>
+            <a:r>
+              <a:rPr sz="1500">
+                <a:solidFill>
+                  <a:srgbClr val="22282E"/>
+                </a:solidFill>
+              </a:rPr>
+              <a:t>•  Geolocation (visual): deducir ubicación por elementos de la escena. Característica: no necesita metadatos.</a:t>
+            </a:r>
+          </a:p>
+          <a:p>
+            <a:pPr>
+              <a:spcAft>
+                <a:spcPts val="600"/>
+              </a:spcAft>
+            </a:pPr>
+            <a:r>
+              <a:rPr sz="1500">
+                <a:solidFill>
+                  <a:srgbClr val="22282E"/>
+                </a:solidFill>
+              </a:rPr>
+              <a:t>•  Chronolocation: estimar fecha/hora por sombras y contexto. Característica: usa geometría solar.</a:t>
+            </a:r>
+          </a:p>
+          <a:p>
+            <a:pPr>
+              <a:spcAft>
+                <a:spcPts val="600"/>
+              </a:spcAft>
+            </a:pPr>
+            <a:r>
+              <a:rPr sz="1500">
+                <a:solidFill>
+                  <a:srgbClr val="22282E"/>
+                </a:solidFill>
+              </a:rPr>
+              <a:t>•  Descontextualización: imagen real usada fuera de su contexto original. Característica: desinformación frecuente.</a:t>
+            </a:r>
+          </a:p>
+          <a:p>
+            <a:pPr>
+              <a:spcAft>
+                <a:spcPts val="600"/>
+              </a:spcAft>
+            </a:pPr>
+            <a:r>
+              <a:rPr sz="1500">
+                <a:solidFill>
+                  <a:srgbClr val="22282E"/>
+                </a:solidFill>
+              </a:rPr>
+              <a:t>•  ELA (Error Level Analysis): técnica para detectar zonas editadas. Característica: indicio, no prueba concluyente.</a:t>
             </a:r>
           </a:p>
         </p:txBody>
